--- a/docs/Financial-Aid-AgentCore-Leadership.pptx
+++ b/docs/Financial-Aid-AgentCore-Leadership.pptx
@@ -1482,7 +1482,7 @@
           <a:p>
             <a:r>
               <a:rPr lang="en-US" dirty="0"/>
-              <a:t>A reproducible, one-command demo stands the stack up, proves 21 checks in ENFORCE, and tears down with zero residual. The Runtime invoke (aid officer full workflow, outsider denied) was also proven live.</a:t>
+              <a:t>A reproducible, one-command demo stands the stack up, proves 31 checks in ENFORCE, and tears down with zero residual. The Runtime invoke (aid officer full workflow, outsider denied) was also proven live.</a:t>
             </a:r>
             <a:endParaRPr lang="en-US" dirty="0"/>
           </a:p>
@@ -2226,7 +2226,7 @@
                 <a:ea typeface="Calibri" pitchFamily="34" charset="-122"/>
                 <a:cs typeface="Calibri" pitchFamily="34" charset="-120"/>
               </a:rPr>
-              <a:t>21 / 21 live governance checks</a:t>
+              <a:t>31 / 31 live governance checks</a:t>
             </a:r>
             <a:endParaRPr lang="en-US" sz="1200" dirty="0"/>
           </a:p>
@@ -6844,7 +6844,7 @@
                 <a:ea typeface="Calibri" pitchFamily="34" charset="-122"/>
                 <a:cs typeface="Calibri" pitchFamily="34" charset="-120"/>
               </a:rPr>
-              <a:t>Stand up the stack live and walk leadership through the 21-check proof.</a:t>
+              <a:t>Stand up the stack live and walk leadership through the 31-check proof.</a:t>
             </a:r>
             <a:endParaRPr lang="en-US" sz="1150" dirty="0"/>
           </a:p>
@@ -14856,7 +14856,7 @@
                 <a:ea typeface="Cambria" pitchFamily="34" charset="-122"/>
                 <a:cs typeface="Cambria" pitchFamily="34" charset="-120"/>
               </a:rPr>
-              <a:t>Proof, not slideware: 21 / 21 governance checks, live on AWS</a:t>
+              <a:t>Proof, not slideware: 31 / 31 governance checks, live on AWS</a:t>
             </a:r>
             <a:endParaRPr lang="en-US" sz="2700" dirty="0"/>
           </a:p>
@@ -14929,7 +14929,7 @@
                 <a:ea typeface="Cambria" pitchFamily="34" charset="-122"/>
                 <a:cs typeface="Cambria" pitchFamily="34" charset="-120"/>
               </a:rPr>
-              <a:t>21/21</a:t>
+              <a:t>31/31</a:t>
             </a:r>
             <a:endParaRPr lang="en-US" sz="3400" dirty="0"/>
           </a:p>

--- a/docs/Financial-Aid-AgentCore-Leadership.pptx
+++ b/docs/Financial-Aid-AgentCore-Leadership.pptx
@@ -1482,7 +1482,7 @@
           <a:p>
             <a:r>
               <a:rPr lang="en-US" dirty="0"/>
-              <a:t>A reproducible, one-command demo stands the stack up, proves 31 checks in ENFORCE, and tears down with zero residual. The Runtime invoke (aid officer full workflow, outsider denied) was also proven live.</a:t>
+              <a:t>A reproducible, one-command demo stands the stack up, proves 32 checks in ENFORCE, and tears down with zero residual. The Runtime invoke (aid officer full workflow, outsider denied) was also proven live.</a:t>
             </a:r>
             <a:endParaRPr lang="en-US" dirty="0"/>
           </a:p>
@@ -2226,7 +2226,7 @@
                 <a:ea typeface="Calibri" pitchFamily="34" charset="-122"/>
                 <a:cs typeface="Calibri" pitchFamily="34" charset="-120"/>
               </a:rPr>
-              <a:t>31 / 31 live governance checks</a:t>
+              <a:t>32 / 32 live governance checks</a:t>
             </a:r>
             <a:endParaRPr lang="en-US" sz="1200" dirty="0"/>
           </a:p>
@@ -6844,7 +6844,7 @@
                 <a:ea typeface="Calibri" pitchFamily="34" charset="-122"/>
                 <a:cs typeface="Calibri" pitchFamily="34" charset="-120"/>
               </a:rPr>
-              <a:t>Stand up the stack live and walk leadership through the 31-check proof.</a:t>
+              <a:t>Stand up the stack live and walk leadership through the 32-check proof.</a:t>
             </a:r>
             <a:endParaRPr lang="en-US" sz="1150" dirty="0"/>
           </a:p>
@@ -14856,7 +14856,7 @@
                 <a:ea typeface="Cambria" pitchFamily="34" charset="-122"/>
                 <a:cs typeface="Cambria" pitchFamily="34" charset="-120"/>
               </a:rPr>
-              <a:t>Proof, not slideware: 31 / 31 governance checks, live on AWS</a:t>
+              <a:t>Proof, not slideware: 32 / 32 governance checks, live on AWS</a:t>
             </a:r>
             <a:endParaRPr lang="en-US" sz="2700" dirty="0"/>
           </a:p>
@@ -14929,7 +14929,7 @@
                 <a:ea typeface="Cambria" pitchFamily="34" charset="-122"/>
                 <a:cs typeface="Cambria" pitchFamily="34" charset="-120"/>
               </a:rPr>
-              <a:t>31/31</a:t>
+              <a:t>32/32</a:t>
             </a:r>
             <a:endParaRPr lang="en-US" sz="3400" dirty="0"/>
           </a:p>

--- a/docs/Financial-Aid-AgentCore-Leadership.pptx
+++ b/docs/Financial-Aid-AgentCore-Leadership.pptx
@@ -1482,7 +1482,7 @@
           <a:p>
             <a:r>
               <a:rPr lang="en-US" dirty="0"/>
-              <a:t>A reproducible, one-command demo stands the stack up, proves 32 checks in ENFORCE, and tears down with zero residual. The Runtime invoke (aid officer full workflow, outsider denied) was also proven live.</a:t>
+              <a:t>The EP1 clean-account run (evidence/EP1-VALIDATION.md) deployed all Gate-B switches, ran the full pipeline live inside a private network with the Scorecard call through a HUD-only... no, a .api.data.gov-only egress firewall, passed a strict PII canary (zero hits incl. Step Functions history), proved exactly-once under a 10-way replay storm, exercised the VerificationHold work-queue path, and tore down with zero residual.</a:t>
             </a:r>
             <a:endParaRPr lang="en-US" dirty="0"/>
           </a:p>
@@ -2175,7 +2175,7 @@
         <p:spPr>
           <a:xfrm>
             <a:off x="640080" y="5029200"/>
-            <a:ext cx="3072384" cy="457200"/>
+            <a:ext cx="2893162" cy="457200"/>
           </a:xfrm>
           <a:prstGeom prst="roundRect">
             <a:avLst>
@@ -2202,7 +2202,7 @@
         <p:spPr>
           <a:xfrm>
             <a:off x="640080" y="5029200"/>
-            <a:ext cx="3072384" cy="457200"/>
+            <a:ext cx="2893162" cy="457200"/>
           </a:xfrm>
           <a:prstGeom prst="rect">
             <a:avLst/>
@@ -2226,7 +2226,7 @@
                 <a:ea typeface="Calibri" pitchFamily="34" charset="-122"/>
                 <a:cs typeface="Calibri" pitchFamily="34" charset="-120"/>
               </a:rPr>
-              <a:t>32 / 32 live governance checks</a:t>
+              <a:t>EP1 live validation captured</a:t>
             </a:r>
             <a:endParaRPr lang="en-US" sz="1200" dirty="0"/>
           </a:p>
@@ -2240,8 +2240,8 @@
         </p:nvSpPr>
         <p:spPr>
           <a:xfrm>
-            <a:off x="3941064" y="5029200"/>
-            <a:ext cx="2445106" cy="457200"/>
+            <a:off x="3761842" y="5029200"/>
+            <a:ext cx="2803550" cy="457200"/>
           </a:xfrm>
           <a:prstGeom prst="roundRect">
             <a:avLst>
@@ -2267,8 +2267,8 @@
         </p:nvSpPr>
         <p:spPr>
           <a:xfrm>
-            <a:off x="3941064" y="5029200"/>
-            <a:ext cx="2445106" cy="457200"/>
+            <a:off x="3761842" y="5029200"/>
+            <a:ext cx="2803550" cy="457200"/>
           </a:xfrm>
           <a:prstGeom prst="rect">
             <a:avLst/>
@@ -2292,7 +2292,7 @@
                 <a:ea typeface="Calibri" pitchFamily="34" charset="-122"/>
                 <a:cs typeface="Calibri" pitchFamily="34" charset="-120"/>
               </a:rPr>
-              <a:t>Agent native on Runtime</a:t>
+              <a:t>Zero FAFSA PII in telemetry</a:t>
             </a:r>
             <a:endParaRPr lang="en-US" sz="1200" dirty="0"/>
           </a:p>
@@ -2306,8 +2306,8 @@
         </p:nvSpPr>
         <p:spPr>
           <a:xfrm>
-            <a:off x="6614770" y="5029200"/>
-            <a:ext cx="3251606" cy="457200"/>
+            <a:off x="6793992" y="5029200"/>
+            <a:ext cx="3789274" cy="457200"/>
           </a:xfrm>
           <a:prstGeom prst="roundRect">
             <a:avLst>
@@ -2333,8 +2333,8 @@
         </p:nvSpPr>
         <p:spPr>
           <a:xfrm>
-            <a:off x="6614770" y="5029200"/>
-            <a:ext cx="3251606" cy="457200"/>
+            <a:off x="6793992" y="5029200"/>
+            <a:ext cx="3789274" cy="457200"/>
           </a:xfrm>
           <a:prstGeom prst="rect">
             <a:avLst/>
@@ -2358,7 +2358,7 @@
                 <a:ea typeface="Calibri" pitchFamily="34" charset="-122"/>
                 <a:cs typeface="Calibri" pitchFamily="34" charset="-120"/>
               </a:rPr>
-              <a:t>Third vertical from one template</a:t>
+              <a:t>Ported from the proven Housing pattern</a:t>
             </a:r>
             <a:endParaRPr lang="en-US" sz="1200" dirty="0"/>
           </a:p>
@@ -6844,7 +6844,7 @@
                 <a:ea typeface="Calibri" pitchFamily="34" charset="-122"/>
                 <a:cs typeface="Calibri" pitchFamily="34" charset="-120"/>
               </a:rPr>
-              <a:t>Stand up the stack live and walk leadership through the 32-check proof.</a:t>
+              <a:t>Stand up the stack live and walk leadership through the captured EP1 evidence.</a:t>
             </a:r>
             <a:endParaRPr lang="en-US" sz="1150" dirty="0"/>
           </a:p>
@@ -14856,7 +14856,7 @@
                 <a:ea typeface="Cambria" pitchFamily="34" charset="-122"/>
                 <a:cs typeface="Cambria" pitchFamily="34" charset="-120"/>
               </a:rPr>
-              <a:t>Proof, not slideware: 32 / 32 governance checks, live on AWS</a:t>
+              <a:t>Proof, not slideware: EP1 live validation captured, all switches on</a:t>
             </a:r>
             <a:endParaRPr lang="en-US" sz="2700" dirty="0"/>
           </a:p>
@@ -14929,7 +14929,7 @@
                 <a:ea typeface="Cambria" pitchFamily="34" charset="-122"/>
                 <a:cs typeface="Cambria" pitchFamily="34" charset="-120"/>
               </a:rPr>
-              <a:t>32/32</a:t>
+              <a:t>137/137</a:t>
             </a:r>
             <a:endParaRPr lang="en-US" sz="3400" dirty="0"/>
           </a:p>
@@ -14968,7 +14968,7 @@
                 <a:ea typeface="Calibri" pitchFamily="34" charset="-122"/>
                 <a:cs typeface="Calibri" pitchFamily="34" charset="-120"/>
               </a:rPr>
-              <a:t>governance checks pass</a:t>
+              <a:t>automated tests green</a:t>
             </a:r>
             <a:endParaRPr lang="en-US" sz="1150" dirty="0"/>
           </a:p>
@@ -15041,7 +15041,7 @@
                 <a:ea typeface="Cambria" pitchFamily="34" charset="-122"/>
                 <a:cs typeface="Cambria" pitchFamily="34" charset="-120"/>
               </a:rPr>
-              <a:t>6</a:t>
+              <a:t>10/10</a:t>
             </a:r>
             <a:endParaRPr lang="en-US" sz="3400" dirty="0"/>
           </a:p>
@@ -15080,7 +15080,7 @@
                 <a:ea typeface="Calibri" pitchFamily="34" charset="-122"/>
                 <a:cs typeface="Calibri" pitchFamily="34" charset="-120"/>
               </a:rPr>
-              <a:t>controls native on AgentCore</a:t>
+              <a:t>concurrent runs live-proven</a:t>
             </a:r>
             <a:endParaRPr lang="en-US" sz="1150" dirty="0"/>
           </a:p>
@@ -15153,7 +15153,7 @@
                 <a:ea typeface="Cambria" pitchFamily="34" charset="-122"/>
                 <a:cs typeface="Cambria" pitchFamily="34" charset="-120"/>
               </a:rPr>
-              <a:t>3</a:t>
+              <a:t>0</a:t>
             </a:r>
             <a:endParaRPr lang="en-US" sz="3400" dirty="0"/>
           </a:p>
@@ -15192,7 +15192,7 @@
                 <a:ea typeface="Calibri" pitchFamily="34" charset="-122"/>
                 <a:cs typeface="Calibri" pitchFamily="34" charset="-120"/>
               </a:rPr>
-              <a:t>regulated controls built &amp; proven</a:t>
+              <a:t>PII hits in any telemetry (strict canary)</a:t>
             </a:r>
             <a:endParaRPr lang="en-US" sz="1150" dirty="0"/>
           </a:p>

--- a/docs/Financial-Aid-AgentCore-Leadership.pptx
+++ b/docs/Financial-Aid-AgentCore-Leadership.pptx
@@ -14929,7 +14929,7 @@
                 <a:ea typeface="Cambria" pitchFamily="34" charset="-122"/>
                 <a:cs typeface="Cambria" pitchFamily="34" charset="-120"/>
               </a:rPr>
-              <a:t>137/137</a:t>
+              <a:t>150/150</a:t>
             </a:r>
             <a:endParaRPr lang="en-US" sz="3400" dirty="0"/>
           </a:p>

--- a/docs/Financial-Aid-AgentCore-Leadership.pptx
+++ b/docs/Financial-Aid-AgentCore-Leadership.pptx
@@ -14929,7 +14929,7 @@
                 <a:ea typeface="Cambria" pitchFamily="34" charset="-122"/>
                 <a:cs typeface="Cambria" pitchFamily="34" charset="-120"/>
               </a:rPr>
-              <a:t>150/150</a:t>
+              <a:t>175/175</a:t>
             </a:r>
             <a:endParaRPr lang="en-US" sz="3400" dirty="0"/>
           </a:p>

--- a/docs/Financial-Aid-AgentCore-Leadership.pptx
+++ b/docs/Financial-Aid-AgentCore-Leadership.pptx
@@ -14929,7 +14929,7 @@
                 <a:ea typeface="Cambria" pitchFamily="34" charset="-122"/>
                 <a:cs typeface="Cambria" pitchFamily="34" charset="-120"/>
               </a:rPr>
-              <a:t>175/175</a:t>
+              <a:t>337/337</a:t>
             </a:r>
             <a:endParaRPr lang="en-US" sz="3400" dirty="0"/>
           </a:p>
